--- a/Emails/Air Arabia - Voice Coaching (Soft Skills - QMF 2026 Aligned).pptx
+++ b/Emails/Air Arabia - Voice Coaching (Soft Skills - QMF 2026 Aligned).pptx
@@ -3138,7 +3138,7 @@
           <a:p>
             <a:r>
               <a:rPr lang="en-US"/>
-              <a:t>RECOMMENDED DURATION: 2.5 hours (150 minutes) including one 10-minute break, best placed right after the Tone Twist Challenge game.
+              <a:t>RECOMMENDED DURATION: 2 hours 20 minutes (140 minutes) including one 10-minute break, best placed right after the Tone Twist Challenge game. (Agenda segments sum to 130 min + 10 min break = 140 min.)
 Lean option: if only 2 hours are available, cut Role-Play to 2 scenarios and trim the Kahoot round to 5 questions.</a:t>
             </a:r>
           </a:p>
@@ -7663,8 +7663,8 @@
         </p:nvSpPr>
         <p:spPr>
           <a:xfrm>
-            <a:off x="838200" y="1741488"/>
-            <a:ext cx="6350000" cy="323165"/>
+            <a:off x="838200" y="1350000"/>
+            <a:ext cx="6350000" cy="500000"/>
           </a:xfrm>
           <a:prstGeom prst="rect">
             <a:avLst/>
@@ -7806,7 +7806,7 @@
         </p:nvSpPr>
         <p:spPr>
           <a:xfrm>
-            <a:off x="838200" y="1422400"/>
+            <a:off x="838200" y="1972400"/>
             <a:ext cx="10515600" cy="1016000"/>
           </a:xfrm>
           <a:prstGeom prst="roundRect">
@@ -7876,7 +7876,7 @@
         </p:nvSpPr>
         <p:spPr>
           <a:xfrm>
-            <a:off x="1016000" y="1524000"/>
+            <a:off x="1016000" y="2074000"/>
             <a:ext cx="762000" cy="304800"/>
           </a:xfrm>
           <a:prstGeom prst="roundRect">
@@ -7953,7 +7953,7 @@
         </p:nvSpPr>
         <p:spPr>
           <a:xfrm>
-            <a:off x="1016000" y="1879600"/>
+            <a:off x="1016000" y="2429600"/>
             <a:ext cx="10160000" cy="307777"/>
           </a:xfrm>
           <a:prstGeom prst="rect">
@@ -7992,7 +7992,7 @@
         </p:nvSpPr>
         <p:spPr>
           <a:xfrm>
-            <a:off x="838200" y="2540000"/>
+            <a:off x="838200" y="3090000"/>
             <a:ext cx="10515600" cy="1016000"/>
           </a:xfrm>
           <a:prstGeom prst="roundRect">
@@ -8062,7 +8062,7 @@
         </p:nvSpPr>
         <p:spPr>
           <a:xfrm>
-            <a:off x="1016000" y="2641600"/>
+            <a:off x="1016000" y="3191600"/>
             <a:ext cx="698500" cy="304800"/>
           </a:xfrm>
           <a:prstGeom prst="roundRect">
@@ -8139,7 +8139,7 @@
         </p:nvSpPr>
         <p:spPr>
           <a:xfrm>
-            <a:off x="1016000" y="2997200"/>
+            <a:off x="1016000" y="3547200"/>
             <a:ext cx="10160000" cy="307777"/>
           </a:xfrm>
           <a:prstGeom prst="rect">
@@ -8178,7 +8178,7 @@
         </p:nvSpPr>
         <p:spPr>
           <a:xfrm>
-            <a:off x="838200" y="3657600"/>
+            <a:off x="838200" y="4207600"/>
             <a:ext cx="10515600" cy="1016000"/>
           </a:xfrm>
           <a:prstGeom prst="roundRect">
@@ -8248,7 +8248,7 @@
         </p:nvSpPr>
         <p:spPr>
           <a:xfrm>
-            <a:off x="1016000" y="3759200"/>
+            <a:off x="1016000" y="4309200"/>
             <a:ext cx="1270000" cy="304800"/>
           </a:xfrm>
           <a:prstGeom prst="roundRect">
@@ -8325,7 +8325,7 @@
         </p:nvSpPr>
         <p:spPr>
           <a:xfrm>
-            <a:off x="1016000" y="4114800"/>
+            <a:off x="1016000" y="4664800"/>
             <a:ext cx="10160000" cy="307777"/>
           </a:xfrm>
           <a:prstGeom prst="rect">
@@ -8425,8 +8425,8 @@
         </p:nvSpPr>
         <p:spPr>
           <a:xfrm>
-            <a:off x="838200" y="1741488"/>
-            <a:ext cx="6350000" cy="323165"/>
+            <a:off x="838200" y="1350000"/>
+            <a:ext cx="6350000" cy="500000"/>
           </a:xfrm>
           <a:prstGeom prst="rect">
             <a:avLst/>
@@ -8568,7 +8568,7 @@
         </p:nvSpPr>
         <p:spPr>
           <a:xfrm>
-            <a:off x="838200" y="1422400"/>
+            <a:off x="838200" y="1972400"/>
             <a:ext cx="10515600" cy="1016000"/>
           </a:xfrm>
           <a:prstGeom prst="roundRect">
@@ -8638,7 +8638,7 @@
         </p:nvSpPr>
         <p:spPr>
           <a:xfrm>
-            <a:off x="1016000" y="1524000"/>
+            <a:off x="1016000" y="2074000"/>
             <a:ext cx="762000" cy="304800"/>
           </a:xfrm>
           <a:prstGeom prst="roundRect">
@@ -8715,7 +8715,7 @@
         </p:nvSpPr>
         <p:spPr>
           <a:xfrm>
-            <a:off x="1016000" y="1879600"/>
+            <a:off x="1016000" y="2429600"/>
             <a:ext cx="10160000" cy="307777"/>
           </a:xfrm>
           <a:prstGeom prst="rect">
@@ -8754,7 +8754,7 @@
         </p:nvSpPr>
         <p:spPr>
           <a:xfrm>
-            <a:off x="838200" y="2540000"/>
+            <a:off x="838200" y="3090000"/>
             <a:ext cx="10515600" cy="1016000"/>
           </a:xfrm>
           <a:prstGeom prst="roundRect">
@@ -8824,7 +8824,7 @@
         </p:nvSpPr>
         <p:spPr>
           <a:xfrm>
-            <a:off x="1016000" y="2641600"/>
+            <a:off x="1016000" y="3191600"/>
             <a:ext cx="698500" cy="304800"/>
           </a:xfrm>
           <a:prstGeom prst="roundRect">
@@ -8901,7 +8901,7 @@
         </p:nvSpPr>
         <p:spPr>
           <a:xfrm>
-            <a:off x="1016000" y="2997200"/>
+            <a:off x="1016000" y="3547200"/>
             <a:ext cx="10160000" cy="307777"/>
           </a:xfrm>
           <a:prstGeom prst="rect">
@@ -8940,7 +8940,7 @@
         </p:nvSpPr>
         <p:spPr>
           <a:xfrm>
-            <a:off x="838200" y="3657600"/>
+            <a:off x="838200" y="4207600"/>
             <a:ext cx="10515600" cy="1016000"/>
           </a:xfrm>
           <a:prstGeom prst="roundRect">
@@ -9010,7 +9010,7 @@
         </p:nvSpPr>
         <p:spPr>
           <a:xfrm>
-            <a:off x="1016000" y="3759200"/>
+            <a:off x="1016000" y="4309200"/>
             <a:ext cx="1270000" cy="304800"/>
           </a:xfrm>
           <a:prstGeom prst="roundRect">
@@ -9087,7 +9087,7 @@
         </p:nvSpPr>
         <p:spPr>
           <a:xfrm>
-            <a:off x="1016000" y="4114800"/>
+            <a:off x="1016000" y="4664800"/>
             <a:ext cx="10160000" cy="307777"/>
           </a:xfrm>
           <a:prstGeom prst="rect">
@@ -9391,8 +9391,8 @@
         </p:nvSpPr>
         <p:spPr>
           <a:xfrm>
-            <a:off x="838200" y="1741488"/>
-            <a:ext cx="6350000" cy="323165"/>
+            <a:off x="838200" y="1350000"/>
+            <a:ext cx="6350000" cy="500000"/>
           </a:xfrm>
           <a:prstGeom prst="rect">
             <a:avLst/>
@@ -9534,7 +9534,7 @@
         </p:nvSpPr>
         <p:spPr>
           <a:xfrm>
-            <a:off x="838200" y="1422400"/>
+            <a:off x="838200" y="1972400"/>
             <a:ext cx="10515600" cy="1016000"/>
           </a:xfrm>
           <a:prstGeom prst="roundRect">
@@ -9604,7 +9604,7 @@
         </p:nvSpPr>
         <p:spPr>
           <a:xfrm>
-            <a:off x="1016000" y="1524000"/>
+            <a:off x="1016000" y="2074000"/>
             <a:ext cx="762000" cy="304800"/>
           </a:xfrm>
           <a:prstGeom prst="roundRect">
@@ -9681,7 +9681,7 @@
         </p:nvSpPr>
         <p:spPr>
           <a:xfrm>
-            <a:off x="1016000" y="1879600"/>
+            <a:off x="1016000" y="2429600"/>
             <a:ext cx="10160000" cy="307777"/>
           </a:xfrm>
           <a:prstGeom prst="rect">
@@ -9720,7 +9720,7 @@
         </p:nvSpPr>
         <p:spPr>
           <a:xfrm>
-            <a:off x="838200" y="2540000"/>
+            <a:off x="838200" y="3090000"/>
             <a:ext cx="10515600" cy="1016000"/>
           </a:xfrm>
           <a:prstGeom prst="roundRect">
@@ -9790,7 +9790,7 @@
         </p:nvSpPr>
         <p:spPr>
           <a:xfrm>
-            <a:off x="1016000" y="2641600"/>
+            <a:off x="1016000" y="3191600"/>
             <a:ext cx="698500" cy="304800"/>
           </a:xfrm>
           <a:prstGeom prst="roundRect">
@@ -9867,7 +9867,7 @@
         </p:nvSpPr>
         <p:spPr>
           <a:xfrm>
-            <a:off x="1016000" y="2997200"/>
+            <a:off x="1016000" y="3547200"/>
             <a:ext cx="10160000" cy="307777"/>
           </a:xfrm>
           <a:prstGeom prst="rect">
@@ -9906,7 +9906,7 @@
         </p:nvSpPr>
         <p:spPr>
           <a:xfrm>
-            <a:off x="838200" y="3657600"/>
+            <a:off x="838200" y="4207600"/>
             <a:ext cx="10515600" cy="1016000"/>
           </a:xfrm>
           <a:prstGeom prst="roundRect">
@@ -9976,7 +9976,7 @@
         </p:nvSpPr>
         <p:spPr>
           <a:xfrm>
-            <a:off x="1016000" y="3759200"/>
+            <a:off x="1016000" y="4309200"/>
             <a:ext cx="1270000" cy="304800"/>
           </a:xfrm>
           <a:prstGeom prst="roundRect">
@@ -10053,7 +10053,7 @@
         </p:nvSpPr>
         <p:spPr>
           <a:xfrm>
-            <a:off x="1016000" y="4114800"/>
+            <a:off x="1016000" y="4664800"/>
             <a:ext cx="10160000" cy="307777"/>
           </a:xfrm>
           <a:prstGeom prst="rect">
@@ -10153,8 +10153,8 @@
         </p:nvSpPr>
         <p:spPr>
           <a:xfrm>
-            <a:off x="838200" y="1741488"/>
-            <a:ext cx="6350000" cy="323165"/>
+            <a:off x="838200" y="1350000"/>
+            <a:ext cx="6350000" cy="500000"/>
           </a:xfrm>
           <a:prstGeom prst="rect">
             <a:avLst/>
@@ -10296,7 +10296,7 @@
         </p:nvSpPr>
         <p:spPr>
           <a:xfrm>
-            <a:off x="838200" y="1422400"/>
+            <a:off x="838200" y="1972400"/>
             <a:ext cx="10515600" cy="1016000"/>
           </a:xfrm>
           <a:prstGeom prst="roundRect">
@@ -10366,7 +10366,7 @@
         </p:nvSpPr>
         <p:spPr>
           <a:xfrm>
-            <a:off x="1016000" y="1524000"/>
+            <a:off x="1016000" y="2074000"/>
             <a:ext cx="762000" cy="304800"/>
           </a:xfrm>
           <a:prstGeom prst="roundRect">
@@ -10443,7 +10443,7 @@
         </p:nvSpPr>
         <p:spPr>
           <a:xfrm>
-            <a:off x="1016000" y="1879600"/>
+            <a:off x="1016000" y="2429600"/>
             <a:ext cx="10160000" cy="307777"/>
           </a:xfrm>
           <a:prstGeom prst="rect">
@@ -10482,7 +10482,7 @@
         </p:nvSpPr>
         <p:spPr>
           <a:xfrm>
-            <a:off x="838200" y="2540000"/>
+            <a:off x="838200" y="3090000"/>
             <a:ext cx="10515600" cy="1016000"/>
           </a:xfrm>
           <a:prstGeom prst="roundRect">
@@ -10552,7 +10552,7 @@
         </p:nvSpPr>
         <p:spPr>
           <a:xfrm>
-            <a:off x="1016000" y="2641600"/>
+            <a:off x="1016000" y="3191600"/>
             <a:ext cx="698500" cy="304800"/>
           </a:xfrm>
           <a:prstGeom prst="roundRect">
@@ -10629,7 +10629,7 @@
         </p:nvSpPr>
         <p:spPr>
           <a:xfrm>
-            <a:off x="1016000" y="2997200"/>
+            <a:off x="1016000" y="3547200"/>
             <a:ext cx="10160000" cy="307777"/>
           </a:xfrm>
           <a:prstGeom prst="rect">
@@ -10668,7 +10668,7 @@
         </p:nvSpPr>
         <p:spPr>
           <a:xfrm>
-            <a:off x="838200" y="3657600"/>
+            <a:off x="838200" y="4207600"/>
             <a:ext cx="10515600" cy="1016000"/>
           </a:xfrm>
           <a:prstGeom prst="roundRect">
@@ -10738,7 +10738,7 @@
         </p:nvSpPr>
         <p:spPr>
           <a:xfrm>
-            <a:off x="1016000" y="3759200"/>
+            <a:off x="1016000" y="4309200"/>
             <a:ext cx="1270000" cy="304800"/>
           </a:xfrm>
           <a:prstGeom prst="roundRect">
@@ -10815,7 +10815,7 @@
         </p:nvSpPr>
         <p:spPr>
           <a:xfrm>
-            <a:off x="1016000" y="4114800"/>
+            <a:off x="1016000" y="4664800"/>
             <a:ext cx="10160000" cy="307777"/>
           </a:xfrm>
           <a:prstGeom prst="rect">
@@ -10915,8 +10915,8 @@
         </p:nvSpPr>
         <p:spPr>
           <a:xfrm>
-            <a:off x="838200" y="1741488"/>
-            <a:ext cx="6350000" cy="323165"/>
+            <a:off x="838200" y="1350000"/>
+            <a:ext cx="6350000" cy="500000"/>
           </a:xfrm>
           <a:prstGeom prst="rect">
             <a:avLst/>
@@ -11058,7 +11058,7 @@
         </p:nvSpPr>
         <p:spPr>
           <a:xfrm>
-            <a:off x="838200" y="1422400"/>
+            <a:off x="838200" y="1972400"/>
             <a:ext cx="10515600" cy="1016000"/>
           </a:xfrm>
           <a:prstGeom prst="roundRect">
@@ -11128,7 +11128,7 @@
         </p:nvSpPr>
         <p:spPr>
           <a:xfrm>
-            <a:off x="1016000" y="1524000"/>
+            <a:off x="1016000" y="2074000"/>
             <a:ext cx="762000" cy="304800"/>
           </a:xfrm>
           <a:prstGeom prst="roundRect">
@@ -11205,7 +11205,7 @@
         </p:nvSpPr>
         <p:spPr>
           <a:xfrm>
-            <a:off x="1016000" y="1879600"/>
+            <a:off x="1016000" y="2429600"/>
             <a:ext cx="10160000" cy="523220"/>
           </a:xfrm>
           <a:prstGeom prst="rect">
@@ -11244,7 +11244,7 @@
         </p:nvSpPr>
         <p:spPr>
           <a:xfrm>
-            <a:off x="838200" y="2540000"/>
+            <a:off x="838200" y="3090000"/>
             <a:ext cx="10515600" cy="1016000"/>
           </a:xfrm>
           <a:prstGeom prst="roundRect">
@@ -11314,7 +11314,7 @@
         </p:nvSpPr>
         <p:spPr>
           <a:xfrm>
-            <a:off x="1016000" y="2641600"/>
+            <a:off x="1016000" y="3191600"/>
             <a:ext cx="698500" cy="304800"/>
           </a:xfrm>
           <a:prstGeom prst="roundRect">
@@ -11391,7 +11391,7 @@
         </p:nvSpPr>
         <p:spPr>
           <a:xfrm>
-            <a:off x="1016000" y="2997200"/>
+            <a:off x="1016000" y="3547200"/>
             <a:ext cx="10160000" cy="307777"/>
           </a:xfrm>
           <a:prstGeom prst="rect">
@@ -11430,7 +11430,7 @@
         </p:nvSpPr>
         <p:spPr>
           <a:xfrm>
-            <a:off x="838200" y="3657600"/>
+            <a:off x="838200" y="4207600"/>
             <a:ext cx="10515600" cy="1016000"/>
           </a:xfrm>
           <a:prstGeom prst="roundRect">
@@ -11500,7 +11500,7 @@
         </p:nvSpPr>
         <p:spPr>
           <a:xfrm>
-            <a:off x="1016000" y="3759200"/>
+            <a:off x="1016000" y="4309200"/>
             <a:ext cx="1270000" cy="304800"/>
           </a:xfrm>
           <a:prstGeom prst="roundRect">
@@ -11577,7 +11577,7 @@
         </p:nvSpPr>
         <p:spPr>
           <a:xfrm>
-            <a:off x="1016000" y="4114800"/>
+            <a:off x="1016000" y="4664800"/>
             <a:ext cx="10160000" cy="307777"/>
           </a:xfrm>
           <a:prstGeom prst="rect">
@@ -12156,6 +12156,8 @@
               <a:spcAft>
                 <a:spcPts val="800"/>
               </a:spcAft>
+              <a:buFont typeface="Wingdings" panose="05000000000000000000" pitchFamily="2" charset="2"/>
+              <a:buChar char="q"/>
             </a:pPr>
             <a:r>
               <a:rPr lang="en-US" sz="1800"/>
@@ -12167,6 +12169,8 @@
               <a:spcAft>
                 <a:spcPts val="800"/>
               </a:spcAft>
+              <a:buFont typeface="Wingdings" panose="05000000000000000000" pitchFamily="2" charset="2"/>
+              <a:buChar char="q"/>
             </a:pPr>
             <a:r>
               <a:rPr lang="en-US" sz="1800"/>
@@ -12178,6 +12182,8 @@
               <a:spcAft>
                 <a:spcPts val="800"/>
               </a:spcAft>
+              <a:buFont typeface="Wingdings" panose="05000000000000000000" pitchFamily="2" charset="2"/>
+              <a:buChar char="q"/>
             </a:pPr>
             <a:r>
               <a:rPr lang="en-US" sz="1800"/>
@@ -12189,6 +12195,8 @@
               <a:spcAft>
                 <a:spcPts val="800"/>
               </a:spcAft>
+              <a:buFont typeface="Wingdings" panose="05000000000000000000" pitchFamily="2" charset="2"/>
+              <a:buChar char="q"/>
             </a:pPr>
             <a:r>
               <a:rPr lang="en-US" sz="1800"/>
@@ -12200,6 +12208,8 @@
               <a:spcAft>
                 <a:spcPts val="800"/>
               </a:spcAft>
+              <a:buFont typeface="Wingdings" panose="05000000000000000000" pitchFamily="2" charset="2"/>
+              <a:buChar char="q"/>
             </a:pPr>
             <a:r>
               <a:rPr lang="en-US" sz="1800"/>
@@ -12211,6 +12221,8 @@
               <a:spcAft>
                 <a:spcPts val="800"/>
               </a:spcAft>
+              <a:buFont typeface="Wingdings" panose="05000000000000000000" pitchFamily="2" charset="2"/>
+              <a:buChar char="q"/>
             </a:pPr>
             <a:r>
               <a:rPr lang="en-US" sz="1800"/>
@@ -12222,6 +12234,8 @@
               <a:spcAft>
                 <a:spcPts val="800"/>
               </a:spcAft>
+              <a:buFont typeface="Wingdings" panose="05000000000000000000" pitchFamily="2" charset="2"/>
+              <a:buChar char="q"/>
             </a:pPr>
             <a:r>
               <a:rPr lang="en-US" sz="1800"/>
@@ -12233,6 +12247,8 @@
               <a:spcAft>
                 <a:spcPts val="800"/>
               </a:spcAft>
+              <a:buFont typeface="Wingdings" panose="05000000000000000000" pitchFamily="2" charset="2"/>
+              <a:buChar char="q"/>
             </a:pPr>
             <a:r>
               <a:rPr lang="en-US" sz="1800"/>
@@ -12244,6 +12260,8 @@
               <a:spcAft>
                 <a:spcPts val="800"/>
               </a:spcAft>
+              <a:buFont typeface="Wingdings" panose="05000000000000000000" pitchFamily="2" charset="2"/>
+              <a:buChar char="q"/>
             </a:pPr>
             <a:r>
               <a:rPr lang="en-US" sz="1800"/>
@@ -12455,7 +12473,7 @@
             </a:pPr>
             <a:r>
               <a:rPr lang="en-US" sz="1800" dirty="0"/>
-              <a:t>Soft Skills Deep Dive (9 QMF behaviors) - 45 min</a:t>
+              <a:t>Soft Skills Cluster 1: Opening, Personalization, Tone &amp; Professionalism + Say This/Not That drill - 20 min</a:t>
             </a:r>
           </a:p>
           <a:p>
@@ -12466,7 +12484,18 @@
             </a:pPr>
             <a:r>
               <a:rPr lang="en-US" sz="1800" dirty="0"/>
-              <a:t>Say This, Not That + Tone Twist Game - 20 min</a:t>
+              <a:t>Soft Skills Cluster 2: Active Listening, Empathy, Acknowledgement + Tone Twist Game - 25 min</a:t>
+            </a:r>
+          </a:p>
+          <a:p>
+            <a:pPr>
+              <a:spcAft>
+                <a:spcPts val="800"/>
+              </a:spcAft>
+            </a:pPr>
+            <a:r>
+              <a:rPr lang="en-US" sz="1800" dirty="0"/>
+              <a:t>Soft Skills Cluster 3: Customer Service Execution, Proactivity &amp; Ownership, Closure Standards - 20 min</a:t>
             </a:r>
           </a:p>
           <a:p>
@@ -14151,7 +14180,7 @@
           <a:p>
             <a:r>
               <a:rPr lang="en-US"/>
-              <a:t>QMF 2026  -  40 Points</a:t>
+              <a:t>QMF 2026  -  40 of 100 Points</a:t>
             </a:r>
           </a:p>
         </p:txBody>
@@ -14228,8 +14257,8 @@
         </p:nvSpPr>
         <p:spPr>
           <a:xfrm>
-            <a:off x="838200" y="1741488"/>
-            <a:ext cx="6350000" cy="323165"/>
+            <a:off x="838200" y="1350000"/>
+            <a:ext cx="6350000" cy="500000"/>
           </a:xfrm>
           <a:prstGeom prst="rect">
             <a:avLst/>
@@ -14371,7 +14400,7 @@
         </p:nvSpPr>
         <p:spPr>
           <a:xfrm>
-            <a:off x="838200" y="1422400"/>
+            <a:off x="838200" y="1972400"/>
             <a:ext cx="10515600" cy="1016000"/>
           </a:xfrm>
           <a:prstGeom prst="roundRect">
@@ -14441,7 +14470,7 @@
         </p:nvSpPr>
         <p:spPr>
           <a:xfrm>
-            <a:off x="1016000" y="1524000"/>
+            <a:off x="1016000" y="2074000"/>
             <a:ext cx="762000" cy="304800"/>
           </a:xfrm>
           <a:prstGeom prst="roundRect">
@@ -14518,7 +14547,7 @@
         </p:nvSpPr>
         <p:spPr>
           <a:xfrm>
-            <a:off x="1016000" y="1879600"/>
+            <a:off x="1016000" y="2429600"/>
             <a:ext cx="10160000" cy="523220"/>
           </a:xfrm>
           <a:prstGeom prst="rect">
@@ -14557,7 +14586,7 @@
         </p:nvSpPr>
         <p:spPr>
           <a:xfrm>
-            <a:off x="838200" y="2540000"/>
+            <a:off x="838200" y="3090000"/>
             <a:ext cx="10515600" cy="1016000"/>
           </a:xfrm>
           <a:prstGeom prst="roundRect">
@@ -14627,7 +14656,7 @@
         </p:nvSpPr>
         <p:spPr>
           <a:xfrm>
-            <a:off x="1016000" y="2641600"/>
+            <a:off x="1016000" y="3191600"/>
             <a:ext cx="698500" cy="304800"/>
           </a:xfrm>
           <a:prstGeom prst="roundRect">
@@ -14704,7 +14733,7 @@
         </p:nvSpPr>
         <p:spPr>
           <a:xfrm>
-            <a:off x="1016000" y="2997200"/>
+            <a:off x="1016000" y="3547200"/>
             <a:ext cx="10160000" cy="307777"/>
           </a:xfrm>
           <a:prstGeom prst="rect">
@@ -14743,7 +14772,7 @@
         </p:nvSpPr>
         <p:spPr>
           <a:xfrm>
-            <a:off x="838200" y="3657600"/>
+            <a:off x="838200" y="4207600"/>
             <a:ext cx="10515600" cy="1016000"/>
           </a:xfrm>
           <a:prstGeom prst="roundRect">
@@ -14813,7 +14842,7 @@
         </p:nvSpPr>
         <p:spPr>
           <a:xfrm>
-            <a:off x="1016000" y="3759200"/>
+            <a:off x="1016000" y="4309200"/>
             <a:ext cx="9906000" cy="292388"/>
           </a:xfrm>
           <a:prstGeom prst="rect">
@@ -14852,7 +14881,7 @@
         </p:nvSpPr>
         <p:spPr>
           <a:xfrm>
-            <a:off x="1016000" y="4089400"/>
+            <a:off x="1016000" y="4639400"/>
             <a:ext cx="10160000" cy="292388"/>
           </a:xfrm>
           <a:prstGeom prst="rect">
@@ -14891,7 +14920,7 @@
         </p:nvSpPr>
         <p:spPr>
           <a:xfrm>
-            <a:off x="838200" y="4775200"/>
+            <a:off x="838200" y="5325200"/>
             <a:ext cx="10515600" cy="1016000"/>
           </a:xfrm>
           <a:prstGeom prst="roundRect">
@@ -14961,7 +14990,7 @@
         </p:nvSpPr>
         <p:spPr>
           <a:xfrm>
-            <a:off x="1016000" y="4876800"/>
+            <a:off x="1016000" y="5426800"/>
             <a:ext cx="1270000" cy="304800"/>
           </a:xfrm>
           <a:prstGeom prst="roundRect">
@@ -15038,7 +15067,7 @@
         </p:nvSpPr>
         <p:spPr>
           <a:xfrm>
-            <a:off x="1016000" y="5232400"/>
+            <a:off x="1016000" y="5782400"/>
             <a:ext cx="10160000" cy="307777"/>
           </a:xfrm>
           <a:prstGeom prst="rect">
@@ -15138,8 +15167,8 @@
         </p:nvSpPr>
         <p:spPr>
           <a:xfrm>
-            <a:off x="838200" y="1741488"/>
-            <a:ext cx="6350000" cy="323165"/>
+            <a:off x="838200" y="1350000"/>
+            <a:ext cx="6350000" cy="500000"/>
           </a:xfrm>
           <a:prstGeom prst="rect">
             <a:avLst/>
@@ -15281,7 +15310,7 @@
         </p:nvSpPr>
         <p:spPr>
           <a:xfrm>
-            <a:off x="838200" y="1422400"/>
+            <a:off x="838200" y="1972400"/>
             <a:ext cx="10515600" cy="1016000"/>
           </a:xfrm>
           <a:prstGeom prst="roundRect">
@@ -15351,7 +15380,7 @@
         </p:nvSpPr>
         <p:spPr>
           <a:xfrm>
-            <a:off x="1016000" y="1524000"/>
+            <a:off x="1016000" y="2074000"/>
             <a:ext cx="762000" cy="304800"/>
           </a:xfrm>
           <a:prstGeom prst="roundRect">
@@ -15428,7 +15457,7 @@
         </p:nvSpPr>
         <p:spPr>
           <a:xfrm>
-            <a:off x="1016000" y="1879600"/>
+            <a:off x="1016000" y="2429600"/>
             <a:ext cx="10160000" cy="523220"/>
           </a:xfrm>
           <a:prstGeom prst="rect">
@@ -15467,7 +15496,7 @@
         </p:nvSpPr>
         <p:spPr>
           <a:xfrm>
-            <a:off x="838200" y="2540000"/>
+            <a:off x="838200" y="3090000"/>
             <a:ext cx="10515600" cy="1016000"/>
           </a:xfrm>
           <a:prstGeom prst="roundRect">
@@ -15537,7 +15566,7 @@
         </p:nvSpPr>
         <p:spPr>
           <a:xfrm>
-            <a:off x="1016000" y="2641600"/>
+            <a:off x="1016000" y="3191600"/>
             <a:ext cx="698500" cy="304800"/>
           </a:xfrm>
           <a:prstGeom prst="roundRect">
@@ -15614,7 +15643,7 @@
         </p:nvSpPr>
         <p:spPr>
           <a:xfrm>
-            <a:off x="1016000" y="2997200"/>
+            <a:off x="1016000" y="3547200"/>
             <a:ext cx="10160000" cy="307777"/>
           </a:xfrm>
           <a:prstGeom prst="rect">
@@ -15653,7 +15682,7 @@
         </p:nvSpPr>
         <p:spPr>
           <a:xfrm>
-            <a:off x="838200" y="3657600"/>
+            <a:off x="838200" y="4207600"/>
             <a:ext cx="10515600" cy="1016000"/>
           </a:xfrm>
           <a:prstGeom prst="roundRect">
@@ -15723,7 +15752,7 @@
         </p:nvSpPr>
         <p:spPr>
           <a:xfrm>
-            <a:off x="1016000" y="3759200"/>
+            <a:off x="1016000" y="4309200"/>
             <a:ext cx="1270000" cy="304800"/>
           </a:xfrm>
           <a:prstGeom prst="roundRect">
@@ -15800,7 +15829,7 @@
         </p:nvSpPr>
         <p:spPr>
           <a:xfrm>
-            <a:off x="1016000" y="4114800"/>
+            <a:off x="1016000" y="4664800"/>
             <a:ext cx="10160000" cy="307777"/>
           </a:xfrm>
           <a:prstGeom prst="rect">
@@ -15900,8 +15929,8 @@
         </p:nvSpPr>
         <p:spPr>
           <a:xfrm>
-            <a:off x="838200" y="1741488"/>
-            <a:ext cx="6350000" cy="323165"/>
+            <a:off x="838200" y="1350000"/>
+            <a:ext cx="6350000" cy="500000"/>
           </a:xfrm>
           <a:prstGeom prst="rect">
             <a:avLst/>
@@ -16043,7 +16072,7 @@
         </p:nvSpPr>
         <p:spPr>
           <a:xfrm>
-            <a:off x="838200" y="1422400"/>
+            <a:off x="838200" y="1972400"/>
             <a:ext cx="10515600" cy="1016000"/>
           </a:xfrm>
           <a:prstGeom prst="roundRect">
@@ -16113,7 +16142,7 @@
         </p:nvSpPr>
         <p:spPr>
           <a:xfrm>
-            <a:off x="1016000" y="1524000"/>
+            <a:off x="1016000" y="2074000"/>
             <a:ext cx="762000" cy="304800"/>
           </a:xfrm>
           <a:prstGeom prst="roundRect">
@@ -16190,7 +16219,7 @@
         </p:nvSpPr>
         <p:spPr>
           <a:xfrm>
-            <a:off x="1016000" y="1879600"/>
+            <a:off x="1016000" y="2429600"/>
             <a:ext cx="10160000" cy="307777"/>
           </a:xfrm>
           <a:prstGeom prst="rect">
@@ -16229,7 +16258,7 @@
         </p:nvSpPr>
         <p:spPr>
           <a:xfrm>
-            <a:off x="838200" y="2540000"/>
+            <a:off x="838200" y="3090000"/>
             <a:ext cx="10515600" cy="1016000"/>
           </a:xfrm>
           <a:prstGeom prst="roundRect">
@@ -16299,7 +16328,7 @@
         </p:nvSpPr>
         <p:spPr>
           <a:xfrm>
-            <a:off x="1016000" y="2641600"/>
+            <a:off x="1016000" y="3191600"/>
             <a:ext cx="698500" cy="304800"/>
           </a:xfrm>
           <a:prstGeom prst="roundRect">
@@ -16376,7 +16405,7 @@
         </p:nvSpPr>
         <p:spPr>
           <a:xfrm>
-            <a:off x="1016000" y="2997200"/>
+            <a:off x="1016000" y="3547200"/>
             <a:ext cx="10160000" cy="307777"/>
           </a:xfrm>
           <a:prstGeom prst="rect">
@@ -16415,7 +16444,7 @@
         </p:nvSpPr>
         <p:spPr>
           <a:xfrm>
-            <a:off x="838200" y="3657600"/>
+            <a:off x="838200" y="4207600"/>
             <a:ext cx="10515600" cy="1016000"/>
           </a:xfrm>
           <a:prstGeom prst="roundRect">
@@ -16485,7 +16514,7 @@
         </p:nvSpPr>
         <p:spPr>
           <a:xfrm>
-            <a:off x="1016000" y="3759200"/>
+            <a:off x="1016000" y="4309200"/>
             <a:ext cx="9906000" cy="292388"/>
           </a:xfrm>
           <a:prstGeom prst="rect">
@@ -16524,7 +16553,7 @@
         </p:nvSpPr>
         <p:spPr>
           <a:xfrm>
-            <a:off x="1016000" y="4089400"/>
+            <a:off x="1016000" y="4639400"/>
             <a:ext cx="10160000" cy="292388"/>
           </a:xfrm>
           <a:prstGeom prst="rect">
@@ -16563,7 +16592,7 @@
         </p:nvSpPr>
         <p:spPr>
           <a:xfrm>
-            <a:off x="838200" y="4775200"/>
+            <a:off x="838200" y="5325200"/>
             <a:ext cx="10515600" cy="1016000"/>
           </a:xfrm>
           <a:prstGeom prst="roundRect">
@@ -16633,7 +16662,7 @@
         </p:nvSpPr>
         <p:spPr>
           <a:xfrm>
-            <a:off x="1016000" y="4876800"/>
+            <a:off x="1016000" y="5426800"/>
             <a:ext cx="1270000" cy="304800"/>
           </a:xfrm>
           <a:prstGeom prst="roundRect">
@@ -16710,7 +16739,7 @@
         </p:nvSpPr>
         <p:spPr>
           <a:xfrm>
-            <a:off x="1016000" y="5232400"/>
+            <a:off x="1016000" y="5782400"/>
             <a:ext cx="10160000" cy="307777"/>
           </a:xfrm>
           <a:prstGeom prst="rect">
@@ -17115,16 +17144,14 @@
         </p:nvSpPr>
         <p:spPr>
           <a:xfrm>
-            <a:off x="6167118" y="1185610"/>
+            <a:off x="482600" y="1185610"/>
             <a:ext cx="5542282" cy="4712270"/>
           </a:xfrm>
           <a:prstGeom prst="roundRect">
             <a:avLst/>
           </a:prstGeom>
           <a:solidFill>
-            <a:schemeClr val="tx1">
-              <a:lumMod val="75000"/>
-            </a:schemeClr>
+            <a:srgbClr val="1B7A3D"/>
           </a:solidFill>
         </p:spPr>
         <p:style>
@@ -17230,7 +17257,7 @@
         </p:nvSpPr>
         <p:spPr>
           <a:xfrm>
-            <a:off x="482600" y="1185609"/>
+            <a:off x="6167118" y="1185609"/>
             <a:ext cx="5542282" cy="4712271"/>
           </a:xfrm>
           <a:prstGeom prst="roundRect">
@@ -17406,8 +17433,8 @@
         </p:nvSpPr>
         <p:spPr>
           <a:xfrm>
-            <a:off x="838200" y="1741488"/>
-            <a:ext cx="6350000" cy="323165"/>
+            <a:off x="838200" y="1350000"/>
+            <a:ext cx="6350000" cy="500000"/>
           </a:xfrm>
           <a:prstGeom prst="rect">
             <a:avLst/>
@@ -17549,7 +17576,7 @@
         </p:nvSpPr>
         <p:spPr>
           <a:xfrm>
-            <a:off x="838200" y="1422400"/>
+            <a:off x="838200" y="1972400"/>
             <a:ext cx="10515600" cy="1016000"/>
           </a:xfrm>
           <a:prstGeom prst="roundRect">
@@ -17619,7 +17646,7 @@
         </p:nvSpPr>
         <p:spPr>
           <a:xfrm>
-            <a:off x="1016000" y="1524000"/>
+            <a:off x="1016000" y="2074000"/>
             <a:ext cx="762000" cy="304800"/>
           </a:xfrm>
           <a:prstGeom prst="roundRect">
@@ -17696,7 +17723,7 @@
         </p:nvSpPr>
         <p:spPr>
           <a:xfrm>
-            <a:off x="1016000" y="1879600"/>
+            <a:off x="1016000" y="2429600"/>
             <a:ext cx="10160000" cy="307777"/>
           </a:xfrm>
           <a:prstGeom prst="rect">
@@ -17735,7 +17762,7 @@
         </p:nvSpPr>
         <p:spPr>
           <a:xfrm>
-            <a:off x="838200" y="2540000"/>
+            <a:off x="838200" y="3090000"/>
             <a:ext cx="10515600" cy="1016000"/>
           </a:xfrm>
           <a:prstGeom prst="roundRect">
@@ -17805,7 +17832,7 @@
         </p:nvSpPr>
         <p:spPr>
           <a:xfrm>
-            <a:off x="1016000" y="2641600"/>
+            <a:off x="1016000" y="3191600"/>
             <a:ext cx="698500" cy="304800"/>
           </a:xfrm>
           <a:prstGeom prst="roundRect">
@@ -17882,7 +17909,7 @@
         </p:nvSpPr>
         <p:spPr>
           <a:xfrm>
-            <a:off x="1016000" y="2997200"/>
+            <a:off x="1016000" y="3547200"/>
             <a:ext cx="10160000" cy="307777"/>
           </a:xfrm>
           <a:prstGeom prst="rect">
@@ -17921,7 +17948,7 @@
         </p:nvSpPr>
         <p:spPr>
           <a:xfrm>
-            <a:off x="838200" y="3657600"/>
+            <a:off x="838200" y="4207600"/>
             <a:ext cx="10515600" cy="1016000"/>
           </a:xfrm>
           <a:prstGeom prst="roundRect">
@@ -17991,7 +18018,7 @@
         </p:nvSpPr>
         <p:spPr>
           <a:xfrm>
-            <a:off x="1016000" y="3759200"/>
+            <a:off x="1016000" y="4309200"/>
             <a:ext cx="1270000" cy="304800"/>
           </a:xfrm>
           <a:prstGeom prst="roundRect">
@@ -18068,7 +18095,7 @@
         </p:nvSpPr>
         <p:spPr>
           <a:xfrm>
-            <a:off x="1016000" y="4114800"/>
+            <a:off x="1016000" y="4664800"/>
             <a:ext cx="10160000" cy="307777"/>
           </a:xfrm>
           <a:prstGeom prst="rect">

--- a/Emails/Air Arabia - Voice Coaching (Soft Skills - QMF 2026 Aligned).pptx
+++ b/Emails/Air Arabia - Voice Coaching (Soft Skills - QMF 2026 Aligned).pptx
@@ -5,10 +5,10 @@
     <p:sldMasterId id="2147483660" r:id="rId1"/>
   </p:sldMasterIdLst>
   <p:notesMasterIdLst>
-    <p:notesMasterId r:id="rId25"/>
+    <p:notesMasterId r:id="rId24"/>
   </p:notesMasterIdLst>
   <p:handoutMasterIdLst>
-    <p:handoutMasterId r:id="rId26"/>
+    <p:handoutMasterId r:id="rId25"/>
   </p:handoutMasterIdLst>
   <p:sldIdLst>
     <p:sldId id="1692" r:id="rId2"/>
@@ -32,8 +32,7 @@
     <p:sldId id="1710" r:id="rId20"/>
     <p:sldId id="1711" r:id="rId21"/>
     <p:sldId id="1712" r:id="rId22"/>
-    <p:sldId id="1713" r:id="rId23"/>
-    <p:sldId id="1714" r:id="rId24"/>
+    <p:sldId id="1714" r:id="rId23"/>
   </p:sldIdLst>
   <p:sldSz cx="12192000" cy="6858000"/>
   <p:notesSz cx="6810375" cy="9942513"/>
@@ -1678,7 +1677,7 @@
           <a:p>
             <a:fld id="{9C19C72D-3C7F-40D0-96A4-36CCF440BC6F}" type="datetimeFigureOut">
               <a:rPr lang="en-US" smtClean="0"/>
-              <a:t>7/21/2026</a:t>
+              <a:t>7/22/2026</a:t>
             </a:fld>
             <a:endParaRPr lang="en-US"/>
           </a:p>
@@ -1855,7 +1854,7 @@
           <a:p>
             <a:fld id="{FD03A4C4-38B8-4859-B918-029A045B2A89}" type="datetimeFigureOut">
               <a:rPr lang="en-US" smtClean="0"/>
-              <a:t>7/21/2026</a:t>
+              <a:t>7/22/2026</a:t>
             </a:fld>
             <a:endParaRPr lang="en-US"/>
           </a:p>
@@ -2958,7 +2957,7 @@
           <a:lstStyle/>
           <a:p>
             <a:r>
-              <a:rPr lang="en-US"/>
+              <a:rPr lang="en-US" dirty="0"/>
               <a:t>The Delayed Flight: a passenger is upset about a 3-hour delay and missed connection.
 The Baggage Complaint: a customer's bag arrived damaged and they are raising their voice.
 The Fare Dispute: a customer insists they were charged incorrectly for extra baggage.
@@ -3409,9 +3408,7 @@
           <a:p>
             <a:r>
               <a:rPr lang="en-US"/>
-              <a:t>OPTION A - Paper handout: print the separate one-page Action Plan handout and hand one to each agent to fill in during this slide.
-OPTION B - Digital via QR code: create a short 3-question form in SurveyMonkey / Google Forms / Microsoft Forms asking: (1) One thing I will practice this week, (2) A phrase or habit I will start using, (3) What I'd like my coach to check in on. Generate a QR code and paste it into the placeholder box on this slide before you present.
-Coach should follow up on these commitments within 1-2 weeks.</a:t>
+              <a:t>Open the floor. Close by re-stating the 9 QMF Soft Skills categories are exactly what will be observed on their next evaluation.</a:t>
             </a:r>
           </a:p>
         </p:txBody>
@@ -3434,93 +3431,6 @@
             <a:fld id="{91CB46AE-C4B5-482D-99D5-52B579412D63}" type="slidenum">
               <a:rPr lang="en-US" smtClean="0"/>
               <a:t>22</a:t>
-            </a:fld>
-            <a:endParaRPr lang="en-US"/>
-          </a:p>
-        </p:txBody>
-      </p:sp>
-    </p:spTree>
-    <p:extLst>
-      <p:ext uri="{BB962C8B-B14F-4D97-AF65-F5344CB8AC3E}">
-        <p14:creationId xmlns:p14="http://schemas.microsoft.com/office/powerpoint/2010/main" val="4205919239"/>
-      </p:ext>
-    </p:extLst>
-  </p:cSld>
-  <p:clrMapOvr>
-    <a:masterClrMapping/>
-  </p:clrMapOvr>
-</p:notes>
-</file>
-
-<file path=ppt/notesSlides/notesSlide23.xml><?xml version="1.0" encoding="utf-8"?>
-<p:notes xmlns:a="http://schemas.openxmlformats.org/drawingml/2006/main" xmlns:r="http://schemas.openxmlformats.org/officeDocument/2006/relationships" xmlns:p="http://schemas.openxmlformats.org/presentationml/2006/main">
-  <p:cSld>
-    <p:spTree>
-      <p:nvGrpSpPr>
-        <p:cNvPr id="1" name=""/>
-        <p:cNvGrpSpPr/>
-        <p:nvPr/>
-      </p:nvGrpSpPr>
-      <p:grpSpPr>
-        <a:xfrm>
-          <a:off x="0" y="0"/>
-          <a:ext cx="0" cy="0"/>
-          <a:chOff x="0" y="0"/>
-          <a:chExt cx="0" cy="0"/>
-        </a:xfrm>
-      </p:grpSpPr>
-      <p:sp>
-        <p:nvSpPr>
-          <p:cNvPr id="2" name="Slide Image Placeholder 1"/>
-          <p:cNvSpPr>
-            <a:spLocks noGrp="1" noRot="1" noChangeAspect="1"/>
-          </p:cNvSpPr>
-          <p:nvPr>
-            <p:ph type="sldImg"/>
-          </p:nvPr>
-        </p:nvSpPr>
-        <p:spPr/>
-      </p:sp>
-      <p:sp>
-        <p:nvSpPr>
-          <p:cNvPr id="3" name="Notes Placeholder 2"/>
-          <p:cNvSpPr>
-            <a:spLocks noGrp="1"/>
-          </p:cNvSpPr>
-          <p:nvPr>
-            <p:ph type="body" idx="1"/>
-          </p:nvPr>
-        </p:nvSpPr>
-        <p:spPr/>
-        <p:txBody>
-          <a:bodyPr/>
-          <a:lstStyle/>
-          <a:p>
-            <a:r>
-              <a:rPr lang="en-US"/>
-              <a:t>Open the floor. Close by re-stating the 9 QMF Soft Skills categories are exactly what will be observed on their next evaluation.</a:t>
-            </a:r>
-          </a:p>
-        </p:txBody>
-      </p:sp>
-      <p:sp>
-        <p:nvSpPr>
-          <p:cNvPr id="4" name="Slide Number Placeholder 3"/>
-          <p:cNvSpPr>
-            <a:spLocks noGrp="1"/>
-          </p:cNvSpPr>
-          <p:nvPr>
-            <p:ph type="sldNum" sz="quarter" idx="5"/>
-          </p:nvPr>
-        </p:nvSpPr>
-        <p:spPr/>
-        <p:txBody>
-          <a:bodyPr/>
-          <a:lstStyle/>
-          <a:p>
-            <a:fld id="{91CB46AE-C4B5-482D-99D5-52B579412D63}" type="slidenum">
-              <a:rPr lang="en-US" smtClean="0"/>
-              <a:t>23</a:t>
             </a:fld>
             <a:endParaRPr lang="en-US"/>
           </a:p>
@@ -7064,7 +6974,7 @@
           <a:p>
             <a:fld id="{2A48C957-5FA4-4D50-A83C-0419425B2E96}" type="datetimeFigureOut">
               <a:rPr lang="en-US" smtClean="0"/>
-              <a:t>7/21/2026</a:t>
+              <a:t>7/22/2026</a:t>
             </a:fld>
             <a:endParaRPr lang="en-US"/>
           </a:p>
@@ -12825,8 +12735,8 @@
           <a:lstStyle/>
           <a:p>
             <a:r>
-              <a:rPr lang="en-US"/>
-              <a:t>Let's Play - Kahoot Time!</a:t>
+              <a:rPr lang="en-US" dirty="0"/>
+              <a:t>Let's Play - Quiz Time!</a:t>
             </a:r>
           </a:p>
         </p:txBody>
@@ -12952,169 +12862,6 @@
 </file>
 
 <file path=ppt/slides/slide22.xml><?xml version="1.0" encoding="utf-8"?>
-<p:sld xmlns:a="http://schemas.openxmlformats.org/drawingml/2006/main" xmlns:r="http://schemas.openxmlformats.org/officeDocument/2006/relationships" xmlns:p="http://schemas.openxmlformats.org/presentationml/2006/main">
-  <p:cSld>
-    <p:spTree>
-      <p:nvGrpSpPr>
-        <p:cNvPr id="1" name=""/>
-        <p:cNvGrpSpPr/>
-        <p:nvPr/>
-      </p:nvGrpSpPr>
-      <p:grpSpPr>
-        <a:xfrm>
-          <a:off x="0" y="0"/>
-          <a:ext cx="0" cy="0"/>
-          <a:chOff x="0" y="0"/>
-          <a:chExt cx="0" cy="0"/>
-        </a:xfrm>
-      </p:grpSpPr>
-      <p:sp>
-        <p:nvSpPr>
-          <p:cNvPr id="2" name="Title 1">
-            <a:extLst>
-              <a:ext uri="{FF2B5EF4-FFF2-40B4-BE49-F238E27FC236}">
-                <a16:creationId xmlns:a16="http://schemas.microsoft.com/office/drawing/2014/main" id="{499D9F7E-9C7E-3151-3A84-8C4693C7821A}"/>
-              </a:ext>
-            </a:extLst>
-          </p:cNvPr>
-          <p:cNvSpPr>
-            <a:spLocks noGrp="1"/>
-          </p:cNvSpPr>
-          <p:nvPr>
-            <p:ph type="title"/>
-          </p:nvPr>
-        </p:nvSpPr>
-        <p:spPr/>
-        <p:txBody>
-          <a:bodyPr/>
-          <a:lstStyle/>
-          <a:p>
-            <a:r>
-              <a:rPr lang="en-US"/>
-              <a:t>Your Action Plan</a:t>
-            </a:r>
-          </a:p>
-        </p:txBody>
-      </p:sp>
-      <p:sp>
-        <p:nvSpPr>
-          <p:cNvPr id="3" name="Rectangle 2">
-            <a:extLst>
-              <a:ext uri="{FF2B5EF4-FFF2-40B4-BE49-F238E27FC236}">
-                <a16:creationId xmlns:a16="http://schemas.microsoft.com/office/drawing/2014/main" id="{40CF8865-C4FB-B0FA-1C22-53BD44680B12}"/>
-              </a:ext>
-            </a:extLst>
-          </p:cNvPr>
-          <p:cNvSpPr/>
-          <p:nvPr/>
-        </p:nvSpPr>
-        <p:spPr>
-          <a:xfrm>
-            <a:off x="4953000" y="2667000"/>
-            <a:ext cx="2794000" cy="2794000"/>
-          </a:xfrm>
-          <a:prstGeom prst="rect">
-            <a:avLst/>
-          </a:prstGeom>
-          <a:solidFill>
-            <a:srgbClr val="F2F2F2"/>
-          </a:solidFill>
-          <a:ln>
-            <a:solidFill>
-              <a:srgbClr val="39454B"/>
-            </a:solidFill>
-            <a:prstDash val="dash"/>
-          </a:ln>
-        </p:spPr>
-        <p:style>
-          <a:lnRef idx="2">
-            <a:schemeClr val="accent1">
-              <a:shade val="15000"/>
-            </a:schemeClr>
-          </a:lnRef>
-          <a:fillRef idx="1">
-            <a:schemeClr val="accent1"/>
-          </a:fillRef>
-          <a:effectRef idx="0">
-            <a:schemeClr val="accent1"/>
-          </a:effectRef>
-          <a:fontRef idx="minor">
-            <a:schemeClr val="lt1"/>
-          </a:fontRef>
-        </p:style>
-        <p:txBody>
-          <a:bodyPr wrap="square" rtlCol="0" anchor="ctr"/>
-          <a:lstStyle/>
-          <a:p>
-            <a:pPr algn="ctr"/>
-            <a:r>
-              <a:rPr lang="en-US" sz="1400">
-                <a:solidFill>
-                  <a:srgbClr val="39454B"/>
-                </a:solidFill>
-              </a:rPr>
-              <a:t>INSERT QR CODE HERE</a:t>
-            </a:r>
-          </a:p>
-        </p:txBody>
-      </p:sp>
-      <p:sp>
-        <p:nvSpPr>
-          <p:cNvPr id="4" name="TextBox 3">
-            <a:extLst>
-              <a:ext uri="{FF2B5EF4-FFF2-40B4-BE49-F238E27FC236}">
-                <a16:creationId xmlns:a16="http://schemas.microsoft.com/office/drawing/2014/main" id="{7F83146C-7D7D-0943-B545-465B0E268F1C}"/>
-              </a:ext>
-            </a:extLst>
-          </p:cNvPr>
-          <p:cNvSpPr txBox="1"/>
-          <p:nvPr/>
-        </p:nvSpPr>
-        <p:spPr>
-          <a:xfrm>
-            <a:off x="4445000" y="5588000"/>
-            <a:ext cx="3810000" cy="307777"/>
-          </a:xfrm>
-          <a:prstGeom prst="rect">
-            <a:avLst/>
-          </a:prstGeom>
-          <a:noFill/>
-        </p:spPr>
-        <p:txBody>
-          <a:bodyPr vert="horz" wrap="square" rtlCol="0">
-            <a:spAutoFit/>
-          </a:bodyPr>
-          <a:lstStyle/>
-          <a:p>
-            <a:pPr algn="ctr"/>
-            <a:r>
-              <a:rPr lang="en-US" sz="1400">
-                <a:solidFill>
-                  <a:srgbClr val="39454B"/>
-                </a:solidFill>
-              </a:rPr>
-              <a:t>Scan to submit your 3 commitments</a:t>
-            </a:r>
-          </a:p>
-        </p:txBody>
-      </p:sp>
-    </p:spTree>
-    <p:extLst>
-      <p:ext uri="{BB962C8B-B14F-4D97-AF65-F5344CB8AC3E}">
-        <p14:creationId xmlns:p14="http://schemas.microsoft.com/office/powerpoint/2010/main" val="3240442831"/>
-      </p:ext>
-    </p:extLst>
-  </p:cSld>
-  <p:clrMapOvr>
-    <a:masterClrMapping/>
-  </p:clrMapOvr>
-  <p:transition spd="med">
-    <p:randomBar/>
-  </p:transition>
-</p:sld>
-</file>
-
-<file path=ppt/slides/slide23.xml><?xml version="1.0" encoding="utf-8"?>
 <p:sld xmlns:a="http://schemas.openxmlformats.org/drawingml/2006/main" xmlns:r="http://schemas.openxmlformats.org/officeDocument/2006/relationships" xmlns:p="http://schemas.openxmlformats.org/presentationml/2006/main">
   <p:cSld>
     <p:spTree>
